--- a/presentation/Delphi_deck.pptx
+++ b/presentation/Delphi_deck.pptx
@@ -515,7 +515,7 @@
           <a:lstStyle/>
           <a:p>
             <a:r>
-              <a:t>[0:00 - 0:18   45 words at 150 wpm]</a:t>
+              <a:t>[0:00 - 0:17   43 words at 150 wpm]</a:t>
             </a:r>
           </a:p>
           <a:p/>
@@ -527,13 +527,13 @@
           <a:p/>
           <a:p>
             <a:r>
-              <a:t>The name does some work here. The oracle at Delphi answered in categories, and somebody else worked out the numbers. That's exactly how this agent is split.</a:t>
+              <a:t>The name does some work. The oracle at Delphi answered in categories, and somebody else worked out the numbers. That's how this agent is split.</a:t>
             </a:r>
           </a:p>
           <a:p/>
           <a:p>
             <a:r>
-              <a:t>Sources: Coin: team_cover/ (reverse of a silver tridrachm of Delphi, c. 480 BC). Account, licence and repository: docs/SUBMISSION.md, README.md.</a:t>
+              <a:t>Sources: Coin: reverse of a silver tridrachm of Delphi, c. 480-470 BC. Münzkabinett der Staatlichen Museen zu Berlin, inv. 18215461; photograph Reinhard Saczewski; the image is licensed Public Domain Mark 1.0 (ikmk.smb.museum/object?id=18215461, checked 2026-09-03). File: team_cover/. Account, licence and repository: docs/SUBMISSION.md, README.md.</a:t>
             </a:r>
           </a:p>
         </p:txBody>
@@ -953,7 +953,7 @@
           <a:lstStyle/>
           <a:p>
             <a:r>
-              <a:t>[0:18 - 0:51   82 words at 150 wpm]</a:t>
+              <a:t>[0:17 - 0:45   70 words at 150 wpm]</a:t>
             </a:r>
           </a:p>
           <a:p/>
@@ -965,25 +965,25 @@
           <a:p/>
           <a:p>
             <a:r>
-              <a:t>This competition runs about three trading sessions. Over three sessions you can't tell an options strategy apart from noise. Index option alphas have been indistinguishable from zero for fifteen years.</a:t>
+              <a:t>This competition runs about three trading sessions. Over three sessions you can't tell an options strategy apart from noise.</a:t>
             </a:r>
           </a:p>
           <a:p/>
           <a:p>
             <a:r>
-              <a:t>And the half of the premium you can actually measure is earned overnight. We're never in a position after the close, so we give it up on purpose.</a:t>
+              <a:t>And the half of the premium you can measure is earned overnight. We're never in a position after the close, so we give it up on purpose.</a:t>
             </a:r>
           </a:p>
           <a:p/>
           <a:p>
             <a:r>
-              <a:t>We don't claim an edge. We built this to give you something checkable on every trade.</a:t>
+              <a:t>So no edge is claimed. We built this to give you something checkable on every trade.</a:t>
             </a:r>
           </a:p>
           <a:p/>
           <a:p>
             <a:r>
-              <a:t>Sources: [1] Dew-Becker &amp; Giglio 2025. [2] Vilkov 2026 and its KNOWN-ISSUES, 2026-08. [3] Muravyev &amp; Ni 2020 JFE. [4] Bailey &amp; Lopez de Prado 2014. [15] Waudby-Smith &amp; Ramdas 2023. [19] Almeida, Freire &amp; Hizmeri 2025. In the repository: docs/THEORY.md sections 8 and 9, docs/evidence.md, README.md 'Why this design'. [R11] scripts/reproduce.py.</a:t>
+              <a:t>Sources: [1] Dew-Becker &amp; Giglio 2025. [2] Vilkov 2026 and its KNOWN-ISSUES, 2026-08. [3] Muravyev &amp; Ni 2020 JFE. [4] Bailey &amp; Lopez de Prado 2012. [15] Waudby-Smith &amp; Ramdas 2023. [19] Almeida, Freire &amp; Hizmeri 2025. In the repository: docs/THEORY.md sections 8 and 9, docs/evidence.md, README.md 'Why this design'. [R11] scripts/reproduce.py.</a:t>
             </a:r>
           </a:p>
         </p:txBody>
@@ -1053,43 +1053,37 @@
           <a:lstStyle/>
           <a:p>
             <a:r>
-              <a:t>[0:51 - 1:41   125 words at 150 wpm]</a:t>
+              <a:t>[0:45 - 1:26   101 words at 150 wpm]</a:t>
             </a:r>
           </a:p>
           <a:p/>
           <a:p>
             <a:r>
-              <a:t>An iron condor is really a prediction interval that you sell. Two strikes, a credit, and you keep it if the close lands inside.</a:t>
+              <a:t>An iron condor is a prediction interval that you sell: two strikes, a credit, and you keep it if the close lands inside.</a:t>
             </a:r>
           </a:p>
           <a:p/>
           <a:p>
             <a:r>
-              <a:t>So the only question is where those strikes go. Most agents pick a fixed distance, or a fixed delta. We don't.</a:t>
+              <a:t>Most agents put those strikes at a fixed distance, or a fixed delta. We don't.</a:t>
             </a:r>
           </a:p>
           <a:p/>
           <a:p>
             <a:r>
-              <a:t>We use conformal risk control. We look back over two hundred and fifty sessions: how far did SPY move, against the move the options priced in?</a:t>
+              <a:t>We use conformal risk control. Look back over two hundred and fifty sessions: how far did SPY move against the move the options priced in?</a:t>
             </a:r>
           </a:p>
           <a:p/>
           <a:p>
             <a:r>
-              <a:t>What the buyer gets paid is a number between zero and one, and it shrinks as we widen. We take the narrowest interval where that payoff stays certified under ten percent of the wing.</a:t>
+              <a:t>What the buyer gets paid shrinks as we widen. We take the narrowest interval where that payoff stays certified under ten percent of the wing.</a:t>
             </a:r>
           </a:p>
           <a:p/>
           <a:p>
             <a:r>
-              <a:t>Certified in finite samples. No assumption about the distribution.</a:t>
-            </a:r>
-          </a:p>
-          <a:p/>
-          <a:p>
-            <a:r>
-              <a:t>Where the black curve crosses ten percent is where we sell.</a:t>
+              <a:t>Certified in finite samples. The one assumption is that the sessions are exchangeable.</a:t>
             </a:r>
           </a:p>
           <a:p/>
@@ -1165,7 +1159,7 @@
           <a:lstStyle/>
           <a:p>
             <a:r>
-              <a:t>[1:41 - 2:21   100 words at 150 wpm]</a:t>
+              <a:t>[1:26 - 1:59   83 words at 150 wpm]</a:t>
             </a:r>
           </a:p>
           <a:p/>
@@ -1177,19 +1171,19 @@
           <a:p/>
           <a:p>
             <a:r>
-              <a:t>Once the interval is fixed, the market puts a price on it. Take the credit, divide by the wing width, and that's the market's own probability of finishing outside. Breeden-Litzenberger.</a:t>
+              <a:t>Once the interval is fixed, the market prices it. Credit divided by wing width is the market's own probability of finishing outside. Breeden-Litzenberger.</a:t>
             </a:r>
           </a:p>
           <a:p/>
           <a:p>
             <a:r>
-              <a:t>So we have two numbers for the same event. The rule is one line.</a:t>
+              <a:t>Two numbers for the same event. The rule is one line.</a:t>
             </a:r>
           </a:p>
           <a:p/>
           <a:p>
             <a:r>
-              <a:t>Sell only if the market pays fifteen percent of the wing. Ten is the certified cost. Five is what the round trip costs us. A cost margin, not a profit target.</a:t>
+              <a:t>Sell only if the market pays fifteen percent of the wing. Ten is the certified cost, five is what the round trip costs us.</a:t>
             </a:r>
           </a:p>
           <a:p/>
@@ -1271,7 +1265,7 @@
           <a:lstStyle/>
           <a:p>
             <a:r>
-              <a:t>[2:21 - 2:56   87 words at 150 wpm]</a:t>
+              <a:t>[1:59 - 2:28   72 words at 150 wpm]</a:t>
             </a:r>
           </a:p>
           <a:p/>
@@ -1283,31 +1277,25 @@
           <a:p/>
           <a:p>
             <a:r>
-              <a:t>It reads headlines with the tickers stripped out, and it answers in categories: the volatility regime, event risk, a strategy family, a veto.</a:t>
+              <a:t>It reads headlines with tickers stripped out and answers in categories: volatility regime, event risk, strategy family, veto.</a:t>
             </a:r>
           </a:p>
           <a:p/>
           <a:p>
             <a:r>
-              <a:t>We ask three times, and all three have to agree. If they don't, we don't trade. That's an abstention filter, not an ensemble.</a:t>
+              <a:t>We ask three times and all three have to agree. If they don't, we don't trade. An abstention filter, not an ensemble.</a:t>
             </a:r>
           </a:p>
           <a:p/>
           <a:p>
             <a:r>
-              <a:t>A second pass can shrink the order or block it. It can never make it bigger.</a:t>
+              <a:t>A second pass can shrink an order or block it, never make it bigger. Strikes, size, limit price and exit are plain code.</a:t>
             </a:r>
           </a:p>
           <a:p/>
           <a:p>
             <a:r>
-              <a:t>Everything with a number on it — strikes, size, limit price, exit — is plain code.</a:t>
-            </a:r>
-          </a:p>
-          <a:p/>
-          <a:p>
-            <a:r>
-              <a:t>Sources: [8] Glasserman &amp; Lin 2023. [9] Kim 2026. [10] Koviazin, Mudarisov, Polyachenko &amp; State, IC-AIF 2026. [11] Thinking Machines Lab 2025. In the repository: README.md 'Architecture', docs/WRITEUP.md 'AI logic', [R7] docs/report_2026-09-02.md (LLM section).</a:t>
+              <a:t>Sources: [8] Glasserman &amp; Lin 2024. [9] Kim 2026. [10] Koviazin, Mudarisov, Polyachenko &amp; State, IC-AIF 2026. [11] Thinking Machines Lab 2025. In the repository: README.md 'Architecture', docs/WRITEUP.md 'AI logic', [R7] docs/report_2026-09-02.md (LLM section).</a:t>
             </a:r>
           </a:p>
         </p:txBody>
@@ -1377,7 +1365,7 @@
           <a:lstStyle/>
           <a:p>
             <a:r>
-              <a:t>[2:56 - 3:36   100 words at 150 wpm]</a:t>
+              <a:t>[2:28 - 3:04   92 words at 150 wpm]</a:t>
             </a:r>
           </a:p>
           <a:p/>
@@ -1389,25 +1377,25 @@
           <a:p/>
           <a:p>
             <a:r>
-              <a:t>We didn't invent those. They come from SEC Rule fifteen-c-three-five, MiFID, FINRA, and the Knight Capital order.</a:t>
+              <a:t>We didn't invent those: SEC Rule fifteen-c-three-five, MiFID, FINRA, and the Knight Capital order.</a:t>
             </a:r>
           </a:p>
           <a:p/>
           <a:p>
             <a:r>
-              <a:t>A session can lose two percent of the account, the whole week six. Every short leg has a bought wing next to it, so the worst case is fixed when the order is built.</a:t>
+              <a:t>A session can lose two percent of the account, the whole week six. Every short leg has a bought wing, so the worst case is fixed when the order is built.</a:t>
             </a:r>
           </a:p>
           <a:p/>
           <a:p>
             <a:r>
-              <a:t>We price in ticks, not percentages. The pilot day taught us why: three rungs, fixed when we decided, expired unfilled while the price dropped from forty-seven cents to thirty-nine in a minute. Now every rung is re-priced when it's sent.</a:t>
+              <a:t>We price in ticks, not percentages. On the pilot day three rungs, fixed when we decided, expired unfilled while the price dropped from forty-seven to thirty-nine cents in a minute. Now every rung is re-priced at send time.</a:t>
             </a:r>
           </a:p>
           <a:p/>
           <a:p>
             <a:r>
-              <a:t>Sources: [12] SEC Rule 15c3-5; MiFID II RTS 6; FINRA Notice 15-09; SEC order in re Knight Capital, 2013. [13] Fu, Li &amp; Musto, SEC DERA. In the repository: [R4] config/risk_limits.yaml and agent/gates/engine.py; [R5] docs/CONFIG_CHANGES.md; [R7] docs/report_2026-09-02.md.</a:t>
+              <a:t>Sources: [12] SEC Rule 15c3-5; MiFID II RTS 6; FINRA Notice 15-09; SEC order in re Knight Capital, 2013. [13] Fu, Li &amp; Musto, SEC DERA. In the repository: [R4] config/risk_limits.yaml and agent/gates/engine.py; [R5] docs/CONFIG_CHANGES.md; [R7] docs/report_2026-09-02.md; [R13] agent/execution/recon.py and commit cb441a8.</a:t>
             </a:r>
           </a:p>
         </p:txBody>
@@ -1477,19 +1465,19 @@
           <a:lstStyle/>
           <a:p>
             <a:r>
-              <a:t>[3:36 - 4:10   87 words at 150 wpm]</a:t>
+              <a:t>[3:04 - 4:03   147 words at 150 wpm]</a:t>
             </a:r>
           </a:p>
           <a:p/>
           <a:p>
             <a:r>
-              <a:t>This is the agent running.</a:t>
+              <a:t>This is the agent running. Let me take you through one cycle.</a:t>
             </a:r>
           </a:p>
           <a:p/>
           <a:p>
             <a:r>
-              <a:t>What we report is the ledger. Every session writes a line, traded or not: what the interval cost, what the market paid, the gap, what we decided, and what the old fixed rule would have done.</a:t>
+              <a:t>Here's the dashboard. The ledger is at the top, and that's what we report. Every session writes a line, traded or not: what the interval cost, what the market paid, the gap, and what we decided.</a:t>
             </a:r>
           </a:p>
           <a:p/>
@@ -1501,7 +1489,19 @@
           <a:p/>
           <a:p>
             <a:r>
-              <a:t>All three Alpaca paths are here: the Trading API places the multi-leg orders, the CLI reconciles on its own, the MCP server is how I inspect it.</a:t>
+              <a:t>This is one full cycle in the audit log: the interval from the calibration set, three regime votes agreeing, thirty-one gates each passing or rejecting, the critic on the finished order, and the ladder walking in ticks until it fills.</a:t>
+            </a:r>
+          </a:p>
+          <a:p/>
+          <a:p>
+            <a:r>
+              <a:t>This is the Alpaca CLI, running independently of the agent — a second path to the same account, which is what the reconciliation gate compares against.</a:t>
+            </a:r>
+          </a:p>
+          <a:p/>
+          <a:p>
+            <a:r>
+              <a:t>And this is the MCP server, how I inspect the account and the chain.</a:t>
             </a:r>
           </a:p>
           <a:p/>
@@ -1583,7 +1583,7 @@
           <a:lstStyle/>
           <a:p>
             <a:r>
-              <a:t>[4:10 - 4:47   91 words at 150 wpm]</a:t>
+              <a:t>[4:03 - 4:36   82 words at 150 wpm]</a:t>
             </a:r>
           </a:p>
           <a:p/>
@@ -1595,31 +1595,31 @@
           <a:p/>
           <a:p>
             <a:r>
-              <a:t>The deterministic part is machine-checked in Lean. Thirteen theorems, no gaps.</a:t>
+              <a:t>The deterministic part is machine-checked in Lean: thirteen theorems, no gaps.</a:t>
             </a:r>
           </a:p>
           <a:p/>
           <a:p>
             <a:r>
-              <a:t>The probabilistic part isn't. We assume it and we cite it. And the certificate holds on average, while our own gate picks which days we trade. That's a real weakness, and it's on the slide.</a:t>
+              <a:t>The probabilistic part isn't. We assume it and cite it. And the certificate holds on average, while our own gate picks the days we trade. That's on the slide.</a:t>
             </a:r>
           </a:p>
           <a:p/>
           <a:p>
             <a:r>
-              <a:t>There's no Sharpe ratio anywhere in this repo. At three sessions it would be a number about nothing.</a:t>
+              <a:t>There's no Sharpe ratio in this repo. At three sessions it would be a number about nothing.</a:t>
             </a:r>
           </a:p>
           <a:p/>
           <a:p>
             <a:r>
-              <a:t>What we do claim: a bound on every trade, a risk process that did exactly what it said, and a ledger anyone can check.</a:t>
+              <a:t>What we claim: a bound on every trade, a risk process that did what it said, and a ledger anyone can check.</a:t>
             </a:r>
           </a:p>
           <a:p/>
           <a:p>
             <a:r>
-              <a:t>Sources: [4] Bailey &amp; Lopez de Prado 2014. [14] Goetzmann, Ingersoll, Spiegel &amp; Welch 2007. [16] Lekeufack et al., ICRA 2024; Ryan 2026. [17] Jin &amp; Ren 2025; Gibbs, Cherian &amp; Candes 2025; Xu, Guo &amp; Wei 2025. [18] Ushakov &amp; Berdinsky 2026; Coelho 2026. In the repository: [R6] lean/Delphi/Condor.lean and lean/README.md; [R1] docs/THEORY.md sections 6 and 8; [R12] research/STATE_OF_THE_ART.md section 14.</a:t>
+              <a:t>Sources: [4] Bailey &amp; Lopez de Prado 2012. [14] Goetzmann, Ingersoll, Spiegel &amp; Welch 2007. [16] Lekeufack et al., ICRA 2024; Ryan 2026. [17] Jin &amp; Ren 2025; Gibbs, Cherian &amp; Candes 2025; Xu, Guo &amp; Wei 2025. [18] Ushakov &amp; Berdinsky 2026; Coelho 2026. In the repository: [R6] lean/Delphi/Condor.lean and lean/README.md; [R1] docs/THEORY.md sections 6 and 8; [R12] research/STATE_OF_THE_ART.md section 14.</a:t>
             </a:r>
           </a:p>
         </p:txBody>
@@ -5102,7 +5102,7 @@
                 <a:spcPts val="0"/>
               </a:spcBef>
               <a:spcAft>
-                <a:spcPts val="0"/>
+                <a:spcPts val="400"/>
               </a:spcAft>
             </a:pPr>
             <a:r>
@@ -5112,7 +5112,29 @@
                 </a:solidFill>
                 <a:latin typeface="Segoe UI"/>
               </a:rPr>
-              <a:t>Reverse of a silver tridrachm of Delphi, c. 480 BC: four coffers, a dolphin in each. Two maxims stood at the temple, nothing in excess and know thyself. They correspond to the loss caps and to the claims this deck does not make.</a:t>
+              <a:t>Reverse of a silver tridrachm of Delphi, c. 480–470 BC: four coffers, a dolphin in each. Two maxims stood at the temple, nothing in excess and know thyself. They correspond to the loss caps and to the claims this deck does not make.</a:t>
+            </a:r>
+          </a:p>
+          <a:p>
+            <a:pPr algn="l">
+              <a:lnSpc>
+                <a:spcPct val="125000"/>
+              </a:lnSpc>
+              <a:spcBef>
+                <a:spcPts val="0"/>
+              </a:spcBef>
+              <a:spcAft>
+                <a:spcPts val="400"/>
+              </a:spcAft>
+            </a:pPr>
+            <a:r>
+              <a:rPr sz="800" b="0" i="0">
+                <a:solidFill>
+                  <a:srgbClr val="979797"/>
+                </a:solidFill>
+                <a:latin typeface="Segoe UI"/>
+              </a:rPr>
+              <a:t>Münzkabinett der Staatlichen Museen zu Berlin, inv. 18215461. Photograph Reinhard Saczewski. Public Domain Mark 1.0.</a:t>
             </a:r>
           </a:p>
         </p:txBody>
@@ -5398,7 +5420,7 @@
                 </a:solidFill>
                 <a:latin typeface="Segoe UI"/>
               </a:rPr>
-              <a:t>A twelve-coefficient logistic regression that can only shrink the position. Two 2026 tabular foundation models were run under the same protocol and did not beat it where anything can be measured.</a:t>
+              <a:t>A twelve-coefficient logistic regression that can only shrink the position. Two 2026 tabular foundation models ran the same protocol and did not beat it.</a:t>
             </a:r>
           </a:p>
         </p:txBody>
@@ -9953,7 +9975,7 @@
                 </a:solidFill>
                 <a:latin typeface="Segoe UI"/>
               </a:rPr>
-              <a:t>Bailey, D. &amp; Lopez de Prado, M. (2014). The Deflated Sharpe Ratio. Journal of Portfolio Management 40(5).</a:t>
+              <a:t>Bailey, D. &amp; Lopez de Prado, M. (2012). The Sharpe Ratio Efficient Frontier. Journal of Risk 15(2) - the Probabilistic Sharpe Ratio and the minimum track record length, which is the claim made here. Their Deflated Sharpe Ratio (2014, JPM 40(5)) addresses a different problem, selection across many trials.</a:t>
             </a:r>
           </a:p>
         </p:txBody>
@@ -9966,7 +9988,7 @@
         </p:nvSpPr>
         <p:spPr>
           <a:xfrm>
-            <a:off x="822960" y="3846880"/>
+            <a:off x="822960" y="4144975"/>
             <a:ext cx="384048" cy="219456"/>
           </a:xfrm>
           <a:prstGeom prst="rect">
@@ -10011,7 +10033,7 @@
         </p:nvSpPr>
         <p:spPr>
           <a:xfrm>
-            <a:off x="1243584" y="3846880"/>
+            <a:off x="1243584" y="4144975"/>
             <a:ext cx="4600803" cy="822960"/>
           </a:xfrm>
           <a:prstGeom prst="rect">
@@ -12428,6 +12450,96 @@
         </p:nvSpPr>
         <p:spPr>
           <a:xfrm>
+            <a:off x="822960" y="4604918"/>
+            <a:ext cx="384048" cy="219456"/>
+          </a:xfrm>
+          <a:prstGeom prst="rect">
+            <a:avLst/>
+          </a:prstGeom>
+          <a:noFill/>
+        </p:spPr>
+        <p:txBody>
+          <a:bodyPr wrap="square" lIns="0" rIns="0" tIns="0" bIns="0" anchor="t">
+            <a:spAutoFit/>
+          </a:bodyPr>
+          <a:lstStyle/>
+          <a:p>
+            <a:pPr algn="l">
+              <a:lnSpc>
+                <a:spcPct val="116000"/>
+              </a:lnSpc>
+              <a:spcBef>
+                <a:spcPts val="0"/>
+              </a:spcBef>
+              <a:spcAft>
+                <a:spcPts val="0"/>
+              </a:spcAft>
+            </a:pPr>
+            <a:r>
+              <a:rPr sz="900" b="0" i="0">
+                <a:solidFill>
+                  <a:srgbClr val="101010"/>
+                </a:solidFill>
+                <a:latin typeface="Segoe UI Semibold"/>
+              </a:rPr>
+              <a:t>[R7]</a:t>
+            </a:r>
+          </a:p>
+        </p:txBody>
+      </p:sp>
+      <p:sp>
+        <p:nvSpPr>
+          <p:cNvPr id="21" name="TextBox 20"/>
+          <p:cNvSpPr txBox="1"/>
+          <p:nvPr/>
+        </p:nvSpPr>
+        <p:spPr>
+          <a:xfrm>
+            <a:off x="1243584" y="4604918"/>
+            <a:ext cx="4600803" cy="822960"/>
+          </a:xfrm>
+          <a:prstGeom prst="rect">
+            <a:avLst/>
+          </a:prstGeom>
+          <a:noFill/>
+        </p:spPr>
+        <p:txBody>
+          <a:bodyPr wrap="square" lIns="0" rIns="0" tIns="0" bIns="0" anchor="t">
+            <a:spAutoFit/>
+          </a:bodyPr>
+          <a:lstStyle/>
+          <a:p>
+            <a:pPr algn="l">
+              <a:lnSpc>
+                <a:spcPct val="126000"/>
+              </a:lnSpc>
+              <a:spcBef>
+                <a:spcPts val="0"/>
+              </a:spcBef>
+              <a:spcAft>
+                <a:spcPts val="0"/>
+              </a:spcAft>
+            </a:pPr>
+            <a:r>
+              <a:rPr sz="900" b="0" i="0">
+                <a:solidFill>
+                  <a:srgbClr val="2B373B"/>
+                </a:solidFill>
+                <a:latin typeface="Segoe UI"/>
+              </a:rPr>
+              <a:t>docs/report_2026-09-02.md — the pilot session, on the development account PA314NYH4H7G.</a:t>
+            </a:r>
+          </a:p>
+        </p:txBody>
+      </p:sp>
+      <p:sp>
+        <p:nvSpPr>
+          <p:cNvPr id="22" name="TextBox 21"/>
+          <p:cNvSpPr txBox="1"/>
+          <p:nvPr/>
+        </p:nvSpPr>
+        <p:spPr>
+          <a:xfrm>
             <a:off x="6347307" y="1883664"/>
             <a:ext cx="384048" cy="219456"/>
           </a:xfrm>
@@ -12460,14 +12572,14 @@
                 </a:solidFill>
                 <a:latin typeface="Segoe UI Semibold"/>
               </a:rPr>
-              <a:t>[R7]</a:t>
-            </a:r>
-          </a:p>
-        </p:txBody>
-      </p:sp>
-      <p:sp>
-        <p:nvSpPr>
-          <p:cNvPr id="21" name="TextBox 20"/>
+              <a:t>[R8]</a:t>
+            </a:r>
+          </a:p>
+        </p:txBody>
+      </p:sp>
+      <p:sp>
+        <p:nvSpPr>
+          <p:cNvPr id="23" name="TextBox 22"/>
           <p:cNvSpPr txBox="1"/>
           <p:nvPr/>
         </p:nvSpPr>
@@ -12505,20 +12617,20 @@
                 </a:solidFill>
                 <a:latin typeface="Segoe UI"/>
               </a:rPr>
-              <a:t>docs/report_2026-09-02.md — the pilot session, on the development account PA314NYH4H7G.</a:t>
-            </a:r>
-          </a:p>
-        </p:txBody>
-      </p:sp>
-      <p:sp>
-        <p:nvSpPr>
-          <p:cNvPr id="22" name="TextBox 21"/>
-          <p:cNvSpPr txBox="1"/>
-          <p:nvPr/>
-        </p:nvSpPr>
-        <p:spPr>
-          <a:xfrm>
-            <a:off x="6347307" y="2337206"/>
+              <a:t>docs/ledger.json and docs/index.html — the published per-session ledger.</a:t>
+            </a:r>
+          </a:p>
+        </p:txBody>
+      </p:sp>
+      <p:sp>
+        <p:nvSpPr>
+          <p:cNvPr id="24" name="TextBox 23"/>
+          <p:cNvSpPr txBox="1"/>
+          <p:nvPr/>
+        </p:nvSpPr>
+        <p:spPr>
+          <a:xfrm>
+            <a:off x="6347307" y="2188159"/>
             <a:ext cx="384048" cy="219456"/>
           </a:xfrm>
           <a:prstGeom prst="rect">
@@ -12550,20 +12662,20 @@
                 </a:solidFill>
                 <a:latin typeface="Segoe UI Semibold"/>
               </a:rPr>
-              <a:t>[R8]</a:t>
-            </a:r>
-          </a:p>
-        </p:txBody>
-      </p:sp>
-      <p:sp>
-        <p:nvSpPr>
-          <p:cNvPr id="23" name="TextBox 22"/>
-          <p:cNvSpPr txBox="1"/>
-          <p:nvPr/>
-        </p:nvSpPr>
-        <p:spPr>
-          <a:xfrm>
-            <a:off x="6767931" y="2337206"/>
+              <a:t>[R9]</a:t>
+            </a:r>
+          </a:p>
+        </p:txBody>
+      </p:sp>
+      <p:sp>
+        <p:nvSpPr>
+          <p:cNvPr id="25" name="TextBox 24"/>
+          <p:cNvSpPr txBox="1"/>
+          <p:nvPr/>
+        </p:nvSpPr>
+        <p:spPr>
+          <a:xfrm>
+            <a:off x="6767931" y="2188159"/>
             <a:ext cx="4600803" cy="822960"/>
           </a:xfrm>
           <a:prstGeom prst="rect">
@@ -12595,14 +12707,14 @@
                 </a:solidFill>
                 <a:latin typeface="Segoe UI"/>
               </a:rPr>
-              <a:t>docs/ledger.json and docs/index.html — the published per-session ledger.</a:t>
-            </a:r>
-          </a:p>
-        </p:txBody>
-      </p:sp>
-      <p:sp>
-        <p:nvSpPr>
-          <p:cNvPr id="24" name="TextBox 23"/>
+              <a:t>docs/regime_model_report.md and research/H_tabular_ml_small_data.md — 21 model configurations and their negative results.</a:t>
+            </a:r>
+          </a:p>
+        </p:txBody>
+      </p:sp>
+      <p:sp>
+        <p:nvSpPr>
+          <p:cNvPr id="26" name="TextBox 25"/>
           <p:cNvSpPr txBox="1"/>
           <p:nvPr/>
         </p:nvSpPr>
@@ -12640,14 +12752,14 @@
                 </a:solidFill>
                 <a:latin typeface="Segoe UI Semibold"/>
               </a:rPr>
-              <a:t>[R9]</a:t>
-            </a:r>
-          </a:p>
-        </p:txBody>
-      </p:sp>
-      <p:sp>
-        <p:nvSpPr>
-          <p:cNvPr id="25" name="TextBox 24"/>
+              <a:t>[R10]</a:t>
+            </a:r>
+          </a:p>
+        </p:txBody>
+      </p:sp>
+      <p:sp>
+        <p:nvSpPr>
+          <p:cNvPr id="27" name="TextBox 26"/>
           <p:cNvSpPr txBox="1"/>
           <p:nvPr/>
         </p:nvSpPr>
@@ -12685,14 +12797,14 @@
                 </a:solidFill>
                 <a:latin typeface="Segoe UI"/>
               </a:rPr>
-              <a:t>docs/regime_model_report.md and research/H_tabular_ml_small_data.md — 21 model configurations and their negative results.</a:t>
-            </a:r>
-          </a:p>
-        </p:txBody>
-      </p:sp>
-      <p:sp>
-        <p:nvSpPr>
-          <p:cNvPr id="26" name="TextBox 25"/>
+              <a:t>research/G_conformal_condor.md — the study behind the conformal condor, including the refutation of the width-changing variant.</a:t>
+            </a:r>
+          </a:p>
+        </p:txBody>
+      </p:sp>
+      <p:sp>
+        <p:nvSpPr>
+          <p:cNvPr id="28" name="TextBox 27"/>
           <p:cNvSpPr txBox="1"/>
           <p:nvPr/>
         </p:nvSpPr>
@@ -12730,14 +12842,14 @@
                 </a:solidFill>
                 <a:latin typeface="Segoe UI Semibold"/>
               </a:rPr>
-              <a:t>[R10]</a:t>
-            </a:r>
-          </a:p>
-        </p:txBody>
-      </p:sp>
-      <p:sp>
-        <p:nvSpPr>
-          <p:cNvPr id="27" name="TextBox 26"/>
+              <a:t>[R11]</a:t>
+            </a:r>
+          </a:p>
+        </p:txBody>
+      </p:sp>
+      <p:sp>
+        <p:nvSpPr>
+          <p:cNvPr id="29" name="TextBox 28"/>
           <p:cNvSpPr txBox="1"/>
           <p:nvPr/>
         </p:nvSpPr>
@@ -12775,14 +12887,14 @@
                 </a:solidFill>
                 <a:latin typeface="Segoe UI"/>
               </a:rPr>
-              <a:t>research/G_conformal_condor.md — the study behind the conformal condor, including the refutation of the width-changing variant.</a:t>
-            </a:r>
-          </a:p>
-        </p:txBody>
-      </p:sp>
-      <p:sp>
-        <p:nvSpPr>
-          <p:cNvPr id="28" name="TextBox 27"/>
+              <a:t>scripts/reproduce.py — regenerates every number quoted in the documents and prints MATCH or MISMATCH.</a:t>
+            </a:r>
+          </a:p>
+        </p:txBody>
+      </p:sp>
+      <p:sp>
+        <p:nvSpPr>
+          <p:cNvPr id="30" name="TextBox 29"/>
           <p:cNvSpPr txBox="1"/>
           <p:nvPr/>
         </p:nvSpPr>
@@ -12820,14 +12932,14 @@
                 </a:solidFill>
                 <a:latin typeface="Segoe UI Semibold"/>
               </a:rPr>
-              <a:t>[R11]</a:t>
-            </a:r>
-          </a:p>
-        </p:txBody>
-      </p:sp>
-      <p:sp>
-        <p:nvSpPr>
-          <p:cNvPr id="29" name="TextBox 28"/>
+              <a:t>[R13]</a:t>
+            </a:r>
+          </a:p>
+        </p:txBody>
+      </p:sp>
+      <p:sp>
+        <p:nvSpPr>
+          <p:cNvPr id="31" name="TextBox 30"/>
           <p:cNvSpPr txBox="1"/>
           <p:nvPr/>
         </p:nvSpPr>
@@ -12865,14 +12977,14 @@
                 </a:solidFill>
                 <a:latin typeface="Segoe UI"/>
               </a:rPr>
-              <a:t>scripts/reproduce.py — regenerates every number quoted in the documents and prints MATCH or MISMATCH.</a:t>
-            </a:r>
-          </a:p>
-        </p:txBody>
-      </p:sp>
-      <p:sp>
-        <p:nvSpPr>
-          <p:cNvPr id="30" name="TextBox 29"/>
+              <a:t>agent/execution/recon.py - the reconciliation gate, with the pilot-day false positive and its cause in the comment; fixed in commit cb441a8.</a:t>
+            </a:r>
+          </a:p>
+        </p:txBody>
+      </p:sp>
+      <p:sp>
+        <p:nvSpPr>
+          <p:cNvPr id="32" name="TextBox 31"/>
           <p:cNvSpPr txBox="1"/>
           <p:nvPr/>
         </p:nvSpPr>
@@ -12917,7 +13029,7 @@
       </p:sp>
       <p:sp>
         <p:nvSpPr>
-          <p:cNvPr id="31" name="TextBox 30"/>
+          <p:cNvPr id="33" name="TextBox 32"/>
           <p:cNvSpPr txBox="1"/>
           <p:nvPr/>
         </p:nvSpPr>
@@ -13152,7 +13264,7 @@
                 </a:solidFill>
                 <a:latin typeface="Segoe UI"/>
               </a:rPr>
-              <a:t>[1] Dew-Becker &amp; Giglio 2025. [2] Vilkov 2026 and its KNOWN-ISSUES, 2026-08. [3] Muravyev &amp; Ni 2020 JFE. [4] Bailey &amp; Lopez de Prado 2014. [15] Waudby-Smith &amp; Ramdas 2023. [19] Almeida, Freire &amp; Hizmeri 2025. In the repository: docs/THEORY.md sections 8 and 9, docs/evidence.md, README.md 'Why this design'. [R11] scripts/reproduce.py.</a:t>
+              <a:t>[1] Dew-Becker &amp; Giglio 2025. [2] Vilkov 2026 and its KNOWN-ISSUES, 2026-08. [3] Muravyev &amp; Ni 2020 JFE. [4] Bailey &amp; Lopez de Prado 2012. [15] Waudby-Smith &amp; Ramdas 2023. [19] Almeida, Freire &amp; Hizmeri 2025. In the repository: docs/THEORY.md sections 8 and 9, docs/evidence.md, README.md 'Why this design'. [R11] scripts/reproduce.py.</a:t>
             </a:r>
           </a:p>
         </p:txBody>
@@ -17562,7 +17674,7 @@
         </p:nvSpPr>
         <p:spPr>
           <a:xfrm>
-            <a:off x="2040940" y="2231136"/>
+            <a:off x="2040940" y="2414016"/>
             <a:ext cx="2867558" cy="548640"/>
           </a:xfrm>
           <a:prstGeom prst="rect">
@@ -17606,7 +17718,7 @@
         </p:nvSpPr>
         <p:spPr>
           <a:xfrm>
-            <a:off x="1426464" y="2231136"/>
+            <a:off x="1426464" y="2414016"/>
             <a:ext cx="614476" cy="548640"/>
           </a:xfrm>
           <a:prstGeom prst="rect">
@@ -17650,7 +17762,7 @@
         </p:nvSpPr>
         <p:spPr>
           <a:xfrm>
-            <a:off x="1170432" y="1993392"/>
+            <a:off x="1170432" y="2176272"/>
             <a:ext cx="1126540" cy="182880"/>
           </a:xfrm>
           <a:prstGeom prst="rect">
@@ -17695,7 +17807,7 @@
         </p:nvSpPr>
         <p:spPr>
           <a:xfrm>
-            <a:off x="4908499" y="2231136"/>
+            <a:off x="4908499" y="2414016"/>
             <a:ext cx="614476" cy="548640"/>
           </a:xfrm>
           <a:prstGeom prst="rect">
@@ -17739,7 +17851,7 @@
         </p:nvSpPr>
         <p:spPr>
           <a:xfrm>
-            <a:off x="4652467" y="1993392"/>
+            <a:off x="4652467" y="2176272"/>
             <a:ext cx="1126540" cy="182880"/>
           </a:xfrm>
           <a:prstGeom prst="rect">
@@ -17784,7 +17896,7 @@
         </p:nvSpPr>
         <p:spPr>
           <a:xfrm>
-            <a:off x="914400" y="2505456"/>
+            <a:off x="914400" y="2688336"/>
             <a:ext cx="5120640" cy="9144"/>
           </a:xfrm>
           <a:prstGeom prst="rect">
@@ -17828,7 +17940,7 @@
         </p:nvSpPr>
         <p:spPr>
           <a:xfrm>
-            <a:off x="1420977" y="2423160"/>
+            <a:off x="1420977" y="2606040"/>
             <a:ext cx="10972" cy="164592"/>
           </a:xfrm>
           <a:prstGeom prst="rect">
@@ -17872,7 +17984,7 @@
         </p:nvSpPr>
         <p:spPr>
           <a:xfrm>
-            <a:off x="1042416" y="2871216"/>
+            <a:off x="1042416" y="3218688"/>
             <a:ext cx="768096" cy="182880"/>
           </a:xfrm>
           <a:prstGeom prst="rect">
@@ -17917,7 +18029,7 @@
         </p:nvSpPr>
         <p:spPr>
           <a:xfrm>
-            <a:off x="2035454" y="2359152"/>
+            <a:off x="2035454" y="2542032"/>
             <a:ext cx="10972" cy="292608"/>
           </a:xfrm>
           <a:prstGeom prst="rect">
@@ -17961,7 +18073,7 @@
         </p:nvSpPr>
         <p:spPr>
           <a:xfrm>
-            <a:off x="1656892" y="2688336"/>
+            <a:off x="1656892" y="3035808"/>
             <a:ext cx="768096" cy="182880"/>
           </a:xfrm>
           <a:prstGeom prst="rect">
@@ -18006,7 +18118,7 @@
         </p:nvSpPr>
         <p:spPr>
           <a:xfrm>
-            <a:off x="3469233" y="2423160"/>
+            <a:off x="3469233" y="2606040"/>
             <a:ext cx="10972" cy="164592"/>
           </a:xfrm>
           <a:prstGeom prst="rect">
@@ -18050,7 +18162,7 @@
         </p:nvSpPr>
         <p:spPr>
           <a:xfrm>
-            <a:off x="3090672" y="2871216"/>
+            <a:off x="3090672" y="3218688"/>
             <a:ext cx="768096" cy="182880"/>
           </a:xfrm>
           <a:prstGeom prst="rect">
@@ -18095,7 +18207,7 @@
         </p:nvSpPr>
         <p:spPr>
           <a:xfrm>
-            <a:off x="4903012" y="2359152"/>
+            <a:off x="4903012" y="2542032"/>
             <a:ext cx="10972" cy="292608"/>
           </a:xfrm>
           <a:prstGeom prst="rect">
@@ -18139,7 +18251,7 @@
         </p:nvSpPr>
         <p:spPr>
           <a:xfrm>
-            <a:off x="4524451" y="2688336"/>
+            <a:off x="4524451" y="3035808"/>
             <a:ext cx="768096" cy="182880"/>
           </a:xfrm>
           <a:prstGeom prst="rect">
@@ -18184,7 +18296,7 @@
         </p:nvSpPr>
         <p:spPr>
           <a:xfrm>
-            <a:off x="5517489" y="2423160"/>
+            <a:off x="5517489" y="2606040"/>
             <a:ext cx="10972" cy="164592"/>
           </a:xfrm>
           <a:prstGeom prst="rect">
@@ -18228,7 +18340,7 @@
         </p:nvSpPr>
         <p:spPr>
           <a:xfrm>
-            <a:off x="5138928" y="2871216"/>
+            <a:off x="5138928" y="3218688"/>
             <a:ext cx="768096" cy="182880"/>
           </a:xfrm>
           <a:prstGeom prst="rect">
@@ -18273,7 +18385,7 @@
         </p:nvSpPr>
         <p:spPr>
           <a:xfrm>
-            <a:off x="2040940" y="1700784"/>
+            <a:off x="2040940" y="1883664"/>
             <a:ext cx="2867558" cy="219456"/>
           </a:xfrm>
           <a:prstGeom prst="rect">
@@ -18318,7 +18430,7 @@
         </p:nvSpPr>
         <p:spPr>
           <a:xfrm>
-            <a:off x="914400" y="3529584"/>
+            <a:off x="914400" y="3675887"/>
             <a:ext cx="2048255" cy="420624"/>
           </a:xfrm>
           <a:prstGeom prst="rect">
@@ -18362,7 +18474,7 @@
         </p:nvSpPr>
         <p:spPr>
           <a:xfrm>
-            <a:off x="2962656" y="3529584"/>
+            <a:off x="2962656" y="3675887"/>
             <a:ext cx="1024127" cy="420624"/>
           </a:xfrm>
           <a:prstGeom prst="rect">
@@ -18406,7 +18518,7 @@
         </p:nvSpPr>
         <p:spPr>
           <a:xfrm>
-            <a:off x="3986783" y="3529584"/>
+            <a:off x="3986783" y="3675887"/>
             <a:ext cx="2048255" cy="420624"/>
           </a:xfrm>
           <a:prstGeom prst="rect">
@@ -18450,7 +18562,7 @@
         </p:nvSpPr>
         <p:spPr>
           <a:xfrm>
-            <a:off x="3977639" y="3419856"/>
+            <a:off x="3977639" y="3566159"/>
             <a:ext cx="18288" cy="640080"/>
           </a:xfrm>
           <a:prstGeom prst="rect">
@@ -18494,7 +18606,7 @@
         </p:nvSpPr>
         <p:spPr>
           <a:xfrm>
-            <a:off x="914400" y="3557015"/>
+            <a:off x="914400" y="3703320"/>
             <a:ext cx="2048255" cy="420624"/>
           </a:xfrm>
           <a:prstGeom prst="rect">
@@ -18561,7 +18673,7 @@
         </p:nvSpPr>
         <p:spPr>
           <a:xfrm>
-            <a:off x="2962656" y="3557015"/>
+            <a:off x="2962656" y="3703320"/>
             <a:ext cx="1024127" cy="420624"/>
           </a:xfrm>
           <a:prstGeom prst="rect">
@@ -18628,7 +18740,7 @@
         </p:nvSpPr>
         <p:spPr>
           <a:xfrm>
-            <a:off x="3986783" y="3557015"/>
+            <a:off x="3986783" y="3703320"/>
             <a:ext cx="2048255" cy="420624"/>
           </a:xfrm>
           <a:prstGeom prst="rect">
@@ -18695,7 +18807,7 @@
         </p:nvSpPr>
         <p:spPr>
           <a:xfrm>
-            <a:off x="914400" y="4133088"/>
+            <a:off x="914400" y="4279392"/>
             <a:ext cx="5120640" cy="457200"/>
           </a:xfrm>
           <a:prstGeom prst="rect">
@@ -19010,7 +19122,7 @@
         </p:nvSpPr>
         <p:spPr>
           <a:xfrm>
-            <a:off x="822960" y="4498848"/>
+            <a:off x="822960" y="4572000"/>
             <a:ext cx="5394960" cy="9144"/>
           </a:xfrm>
           <a:prstGeom prst="rect">
@@ -19054,7 +19166,7 @@
         </p:nvSpPr>
         <p:spPr>
           <a:xfrm>
-            <a:off x="822960" y="4608576"/>
+            <a:off x="822960" y="4681728"/>
             <a:ext cx="5394960" cy="384048"/>
           </a:xfrm>
           <a:prstGeom prst="rect">
@@ -19108,7 +19220,7 @@
         </p:nvSpPr>
         <p:spPr>
           <a:xfrm>
-            <a:off x="822960" y="5010912"/>
+            <a:off x="822960" y="5065776"/>
             <a:ext cx="1850745" cy="201168"/>
           </a:xfrm>
           <a:prstGeom prst="rect">
@@ -19153,7 +19265,7 @@
         </p:nvSpPr>
         <p:spPr>
           <a:xfrm>
-            <a:off x="2765145" y="5010912"/>
+            <a:off x="2765145" y="5065776"/>
             <a:ext cx="771753" cy="201168"/>
           </a:xfrm>
           <a:prstGeom prst="rect">
@@ -19198,7 +19310,7 @@
         </p:nvSpPr>
         <p:spPr>
           <a:xfrm>
-            <a:off x="3628339" y="5010912"/>
+            <a:off x="3628339" y="5065776"/>
             <a:ext cx="771753" cy="201168"/>
           </a:xfrm>
           <a:prstGeom prst="rect">
@@ -19243,7 +19355,7 @@
         </p:nvSpPr>
         <p:spPr>
           <a:xfrm>
-            <a:off x="4491532" y="5010912"/>
+            <a:off x="4491532" y="5065776"/>
             <a:ext cx="771753" cy="201168"/>
           </a:xfrm>
           <a:prstGeom prst="rect">
@@ -19288,7 +19400,7 @@
         </p:nvSpPr>
         <p:spPr>
           <a:xfrm>
-            <a:off x="5354726" y="5010912"/>
+            <a:off x="5354726" y="5065776"/>
             <a:ext cx="771753" cy="201168"/>
           </a:xfrm>
           <a:prstGeom prst="rect">
@@ -19333,7 +19445,7 @@
         </p:nvSpPr>
         <p:spPr>
           <a:xfrm>
-            <a:off x="822960" y="5239512"/>
+            <a:off x="822960" y="5294376"/>
             <a:ext cx="5394960" cy="9144"/>
           </a:xfrm>
           <a:prstGeom prst="rect">
@@ -19377,7 +19489,7 @@
         </p:nvSpPr>
         <p:spPr>
           <a:xfrm>
-            <a:off x="822960" y="5321808"/>
+            <a:off x="822960" y="5376672"/>
             <a:ext cx="1850745" cy="201168"/>
           </a:xfrm>
           <a:prstGeom prst="rect">
@@ -19422,7 +19534,7 @@
         </p:nvSpPr>
         <p:spPr>
           <a:xfrm>
-            <a:off x="2765145" y="5321808"/>
+            <a:off x="2765145" y="5376672"/>
             <a:ext cx="771753" cy="201168"/>
           </a:xfrm>
           <a:prstGeom prst="rect">
@@ -19467,7 +19579,7 @@
         </p:nvSpPr>
         <p:spPr>
           <a:xfrm>
-            <a:off x="3628339" y="5321808"/>
+            <a:off x="3628339" y="5376672"/>
             <a:ext cx="771753" cy="201168"/>
           </a:xfrm>
           <a:prstGeom prst="rect">
@@ -19512,7 +19624,7 @@
         </p:nvSpPr>
         <p:spPr>
           <a:xfrm>
-            <a:off x="4491532" y="5321808"/>
+            <a:off x="4491532" y="5376672"/>
             <a:ext cx="771753" cy="201168"/>
           </a:xfrm>
           <a:prstGeom prst="rect">
@@ -19557,7 +19669,7 @@
         </p:nvSpPr>
         <p:spPr>
           <a:xfrm>
-            <a:off x="5354726" y="5321808"/>
+            <a:off x="5354726" y="5376672"/>
             <a:ext cx="771753" cy="201168"/>
           </a:xfrm>
           <a:prstGeom prst="rect">
@@ -19602,7 +19714,7 @@
         </p:nvSpPr>
         <p:spPr>
           <a:xfrm>
-            <a:off x="822960" y="5504688"/>
+            <a:off x="822960" y="5559552"/>
             <a:ext cx="5394960" cy="9144"/>
           </a:xfrm>
           <a:prstGeom prst="rect">
@@ -19646,7 +19758,7 @@
         </p:nvSpPr>
         <p:spPr>
           <a:xfrm>
-            <a:off x="822960" y="5522976"/>
+            <a:off x="822960" y="5577840"/>
             <a:ext cx="1850745" cy="201168"/>
           </a:xfrm>
           <a:prstGeom prst="rect">
@@ -19691,7 +19803,7 @@
         </p:nvSpPr>
         <p:spPr>
           <a:xfrm>
-            <a:off x="2765145" y="5522976"/>
+            <a:off x="2765145" y="5577840"/>
             <a:ext cx="771753" cy="201168"/>
           </a:xfrm>
           <a:prstGeom prst="rect">
@@ -19736,7 +19848,7 @@
         </p:nvSpPr>
         <p:spPr>
           <a:xfrm>
-            <a:off x="3628339" y="5522976"/>
+            <a:off x="3628339" y="5577840"/>
             <a:ext cx="771753" cy="201168"/>
           </a:xfrm>
           <a:prstGeom prst="rect">
@@ -19781,7 +19893,7 @@
         </p:nvSpPr>
         <p:spPr>
           <a:xfrm>
-            <a:off x="4491532" y="5522976"/>
+            <a:off x="4491532" y="5577840"/>
             <a:ext cx="771753" cy="201168"/>
           </a:xfrm>
           <a:prstGeom prst="rect">
@@ -19826,7 +19938,7 @@
         </p:nvSpPr>
         <p:spPr>
           <a:xfrm>
-            <a:off x="5354726" y="5522976"/>
+            <a:off x="5354726" y="5577840"/>
             <a:ext cx="771753" cy="201168"/>
           </a:xfrm>
           <a:prstGeom prst="rect">
@@ -20055,7 +20167,7 @@
                 </a:solidFill>
                 <a:latin typeface="Segoe UI"/>
               </a:rPr>
-              <a:t>[8] Glasserman &amp; Lin 2023. [9] Kim 2026. [10] Koviazin, Mudarisov, Polyachenko &amp; State, IC-AIF 2026. [11] Thinking Machines Lab 2025. In the repository: README.md 'Architecture', docs/WRITEUP.md 'AI logic', [R7] docs/report_2026-09-02.md (LLM section).</a:t>
+              <a:t>[8] Glasserman &amp; Lin 2024. [9] Kim 2026. [10] Koviazin, Mudarisov, Polyachenko &amp; State, IC-AIF 2026. [11] Thinking Machines Lab 2025. In the repository: README.md 'Architecture', docs/WRITEUP.md 'AI logic', [R7] docs/report_2026-09-02.md (LLM section).</a:t>
             </a:r>
           </a:p>
         </p:txBody>
@@ -22083,7 +22195,7 @@
                 </a:solidFill>
                 <a:latin typeface="Segoe UI"/>
               </a:rPr>
-              <a:t>[12] SEC Rule 15c3-5; MiFID II RTS 6; FINRA Notice 15-09; SEC order in re Knight Capital, 2013. [13] Fu, Li &amp; Musto, SEC DERA. In the repository: [R4] config/risk_limits.yaml and agent/gates/engine.py; [R5] docs/CONFIG_CHANGES.md; [R7] docs/report_2026-09-02.md.</a:t>
+              <a:t>[12] SEC Rule 15c3-5; MiFID II RTS 6; FINRA Notice 15-09; SEC order in re Knight Capital, 2013. [13] Fu, Li &amp; Musto, SEC DERA. In the repository: [R4] config/risk_limits.yaml and agent/gates/engine.py; [R5] docs/CONFIG_CHANGES.md; [R7] docs/report_2026-09-02.md; [R13] agent/execution/recon.py and commit cb441a8.</a:t>
             </a:r>
           </a:p>
         </p:txBody>
@@ -22662,7 +22774,25 @@
                 </a:solidFill>
                 <a:latin typeface="Segoe UI"/>
               </a:rPr>
-              <a:t>Kill switch checked every cycle with cancel-all under five seconds, a daily loss kill on an independent code path, and order and position reconciliation every cycle. A mismatch halts new risk, and did so on the pilot day. [R7]</a:t>
+              <a:t>Kill switch checked every cycle with cancel-all under five seconds, a daily loss kill on an independent code path, and order and position reconciliation every cycle. A mismatch halts new risk, and on the pilot day one did — on a book that was correct. alpaca-py returns the side as </a:t>
+            </a:r>
+            <a:r>
+              <a:rPr sz="850" b="0" i="0">
+                <a:solidFill>
+                  <a:srgbClr val="2B373B"/>
+                </a:solidFill>
+                <a:latin typeface="Consolas"/>
+              </a:rPr>
+              <a:t>PositionSide.LONG</a:t>
+            </a:r>
+            <a:r>
+              <a:rPr sz="900" b="0" i="0">
+                <a:solidFill>
+                  <a:srgbClr val="2B373B"/>
+                </a:solidFill>
+                <a:latin typeface="Segoe UI"/>
+              </a:rPr>
+              <a:t>, the comparison was case-sensitive, so every bought wing read as short. The control did its job; the defect was ours, and it is fixed. [R7][R13]</a:t>
             </a:r>
           </a:p>
         </p:txBody>
@@ -24914,7 +25044,7 @@
                 </a:solidFill>
                 <a:latin typeface="Segoe UI"/>
               </a:rPr>
-              <a:t>[4] Bailey &amp; Lopez de Prado 2014. [14] Goetzmann, Ingersoll, Spiegel &amp; Welch 2007. [16] Lekeufack et al., ICRA 2024; Ryan 2026. [17] Jin &amp; Ren 2025; Gibbs, Cherian &amp; Candes 2025; Xu, Guo &amp; Wei 2025. [18] Ushakov &amp; Berdinsky 2026; Coelho 2026. In the repository: [R6] lean/Delphi/Condor.lean and lean/README.md; [R1] docs/THEORY.md sections 6 and 8; [R12] research/STATE_OF_THE_ART.md section 14.</a:t>
+              <a:t>[4] Bailey &amp; Lopez de Prado 2012. [14] Goetzmann, Ingersoll, Spiegel &amp; Welch 2007. [16] Lekeufack et al., ICRA 2024; Ryan 2026. [17] Jin &amp; Ren 2025; Gibbs, Cherian &amp; Candes 2025; Xu, Guo &amp; Wei 2025. [18] Ushakov &amp; Berdinsky 2026; Coelho 2026. In the repository: [R6] lean/Delphi/Condor.lean and lean/README.md; [R1] docs/THEORY.md sections 6 and 8; [R12] research/STATE_OF_THE_ART.md section 14.</a:t>
             </a:r>
           </a:p>
         </p:txBody>

--- a/presentation/Delphi_deck.pptx
+++ b/presentation/Delphi_deck.pptx
@@ -10425,7 +10425,7 @@
                 </a:solidFill>
                 <a:latin typeface="Segoe UI"/>
               </a:rPr>
-              <a:t>Kim (2026) and Bahuguna (2026) on majority voting across size-3 model subsets. Full entries in research/STATE_OF_THE_ART.md, section 14.</a:t>
+              <a:t>Kim (2026). Are Diversity Metrics Measuring Diversity? arXiv:2607.20768 - majority voting beats the strongest member in 9.98 % of size-3 subsets. Bahuguna (2026). arXiv:2608.11403 - majority voting lowers accuracy on hard tasks. Zhang et al. (2026). arXiv:2608.18795 - agreement is graded evidence, not certification.</a:t>
             </a:r>
           </a:p>
         </p:txBody>
@@ -10438,7 +10438,7 @@
         </p:nvSpPr>
         <p:spPr>
           <a:xfrm>
-            <a:off x="6347307" y="3697833"/>
+            <a:off x="6347307" y="3995928"/>
             <a:ext cx="384048" cy="219456"/>
           </a:xfrm>
           <a:prstGeom prst="rect">
@@ -10483,7 +10483,7 @@
         </p:nvSpPr>
         <p:spPr>
           <a:xfrm>
-            <a:off x="6767931" y="3697833"/>
+            <a:off x="6767931" y="3995928"/>
             <a:ext cx="4600803" cy="822960"/>
           </a:xfrm>
           <a:prstGeom prst="rect">
